--- a/system-design-101/vi/lessons/sd-02-025/slides/sd-02-025.pptx
+++ b/system-design-101/vi/lessons/sd-02-025/slides/sd-02-025.pptx
@@ -2969,7 +2969,7 @@
                 <a:gridCol w="6254496"/>
                 <a:gridCol w="7900416"/>
               </a:tblGrid>
-              <a:tr h="876300">
+              <a:tr h="800100">
                 <a:tc>
                   <a:txBody>
                     <a:bodyPr/>
@@ -3168,7 +3168,7 @@
                   </a:tcPr>
                 </a:tc>
               </a:tr>
-              <a:tr h="876300">
+              <a:tr h="800100">
                 <a:tc>
                   <a:txBody>
                     <a:bodyPr/>
@@ -3407,7 +3407,7 @@
                   </a:tcPr>
                 </a:tc>
               </a:tr>
-              <a:tr h="876300">
+              <a:tr h="800100">
                 <a:tc>
                   <a:txBody>
                     <a:bodyPr/>
@@ -3657,7 +3657,7 @@
                   </a:tcPr>
                 </a:tc>
               </a:tr>
-              <a:tr h="876300">
+              <a:tr h="800100">
                 <a:tc>
                   <a:txBody>
                     <a:bodyPr/>
@@ -3907,7 +3907,7 @@
                   </a:tcPr>
                 </a:tc>
               </a:tr>
-              <a:tr h="876300">
+              <a:tr h="800100">
                 <a:tc>
                   <a:txBody>
                     <a:bodyPr/>
@@ -4157,6 +4157,201 @@
                   </a:tcPr>
                 </a:tc>
               </a:tr>
+              <a:tr h="800100">
+                <a:tc>
+                  <a:txBody>
+                    <a:bodyPr/>
+                    <a:lstStyle/>
+                    <a:p>
+                      <a:pPr algn="l" indent="0" marL="0">
+                        <a:lnSpc>
+                          <a:spcPts val="2700"/>
+                        </a:lnSpc>
+                        <a:buNone/>
+                      </a:pPr>
+                      <a:r>
+                        <a:rPr lang="en-US" sz="2250" dirty="0" spc="3" kern="0">
+                          <a:solidFill>
+                            <a:srgbClr val="7C93FF"/>
+                          </a:solidFill>
+                          <a:latin typeface="Be Vietnam Pro" pitchFamily="34" charset="0"/>
+                          <a:ea typeface="Be Vietnam Pro" pitchFamily="34" charset="-122"/>
+                          <a:cs typeface="Be Vietnam Pro" pitchFamily="34" charset="-120"/>
+                        </a:rPr>
+                        <a:t>ID</a:t>
+                      </a:r>
+                      <a:endParaRPr lang="en-US" sz="1200" dirty="0"/>
+                    </a:p>
+                  </a:txBody>
+                  <a:tcPr marL="76200" marR="76200" marT="76200" marB="76200">
+                    <a:lnL w="9525" cap="flat" cmpd="sng" algn="ctr">
+                      <a:solidFill>
+                        <a:srgbClr val="2D3140"/>
+                      </a:solidFill>
+                      <a:prstDash val="solid"/>
+                      <a:round/>
+                      <a:headEnd type="none" w="med" len="med"/>
+                      <a:tailEnd type="none" w="med" len="med"/>
+                    </a:lnL>
+                    <a:lnR w="0" cap="flat" cmpd="sng" algn="ctr">
+                      <a:noFill/>
+                    </a:lnR>
+                    <a:lnT w="9525" cap="flat" cmpd="sng" algn="ctr">
+                      <a:solidFill>
+                        <a:srgbClr val="2D3140"/>
+                      </a:solidFill>
+                      <a:prstDash val="solid"/>
+                      <a:round/>
+                      <a:headEnd type="none" w="med" len="med"/>
+                      <a:tailEnd type="none" w="med" len="med"/>
+                    </a:lnT>
+                    <a:lnB w="0" cap="flat" cmpd="sng" algn="ctr">
+                      <a:noFill/>
+                    </a:lnB>
+                    <a:solidFill>
+                      <a:srgbClr val="1A1D25"/>
+                    </a:solidFill>
+                  </a:tcPr>
+                </a:tc>
+                <a:tc>
+                  <a:txBody>
+                    <a:bodyPr/>
+                    <a:lstStyle/>
+                    <a:p>
+                      <a:pPr algn="l" indent="0" marL="0">
+                        <a:lnSpc>
+                          <a:spcPts val="2700"/>
+                        </a:lnSpc>
+                        <a:buNone/>
+                      </a:pPr>
+                      <a:r>
+                        <a:rPr lang="en-US" sz="2250" dirty="0" spc="-4" kern="0">
+                          <a:solidFill>
+                            <a:srgbClr val="E4E1D8"/>
+                          </a:solidFill>
+                          <a:latin typeface="Be Vietnam Pro" pitchFamily="34" charset="0"/>
+                          <a:ea typeface="Be Vietnam Pro" pitchFamily="34" charset="-122"/>
+                          <a:cs typeface="Be Vietnam Pro" pitchFamily="34" charset="-120"/>
+                        </a:rPr>
+                        <a:t>IDentifier</a:t>
+                      </a:r>
+                      <a:endParaRPr lang="en-US" sz="1200" dirty="0"/>
+                    </a:p>
+                  </a:txBody>
+                  <a:tcPr marL="76200" marR="76200" marT="76200" marB="76200">
+                    <a:lnL w="9525" cap="flat" cmpd="sng" algn="ctr">
+                      <a:solidFill>
+                        <a:srgbClr val="2D3140"/>
+                      </a:solidFill>
+                      <a:prstDash val="solid"/>
+                      <a:round/>
+                      <a:headEnd type="none" w="med" len="med"/>
+                      <a:tailEnd type="none" w="med" len="med"/>
+                    </a:lnL>
+                    <a:lnR w="0" cap="flat" cmpd="sng" algn="ctr">
+                      <a:noFill/>
+                    </a:lnR>
+                    <a:lnT w="9525" cap="flat" cmpd="sng" algn="ctr">
+                      <a:solidFill>
+                        <a:srgbClr val="2D3140"/>
+                      </a:solidFill>
+                      <a:prstDash val="solid"/>
+                      <a:round/>
+                      <a:headEnd type="none" w="med" len="med"/>
+                      <a:tailEnd type="none" w="med" len="med"/>
+                    </a:lnT>
+                    <a:lnB w="0" cap="flat" cmpd="sng" algn="ctr">
+                      <a:noFill/>
+                    </a:lnB>
+                    <a:solidFill>
+                      <a:srgbClr val="1A1D25"/>
+                    </a:solidFill>
+                  </a:tcPr>
+                </a:tc>
+                <a:tc>
+                  <a:txBody>
+                    <a:bodyPr/>
+                    <a:lstStyle/>
+                    <a:p>
+                      <a:pPr algn="l" indent="0" marL="0">
+                        <a:lnSpc>
+                          <a:spcPts val="2700"/>
+                        </a:lnSpc>
+                        <a:buNone/>
+                      </a:pPr>
+                      <a:r>
+                        <a:rPr lang="en-US" sz="2250" dirty="0" spc="-5" kern="0">
+                          <a:solidFill>
+                            <a:srgbClr val="E4E1D8"/>
+                          </a:solidFill>
+                          <a:latin typeface="Be Vietnam Pro" pitchFamily="34" charset="0"/>
+                          <a:ea typeface="Be Vietnam Pro" pitchFamily="34" charset="-122"/>
+                          <a:cs typeface="Be Vietnam Pro" pitchFamily="34" charset="-120"/>
+                        </a:rPr>
+                        <a:t>mã</a:t>
+                      </a:r>
+                      <a:r>
+                        <a:rPr lang="en-US" sz="2250" dirty="0" spc="19" kern="0">
+                          <a:solidFill>
+                            <a:srgbClr val="E4E1D8"/>
+                          </a:solidFill>
+                          <a:latin typeface="Be Vietnam Pro" pitchFamily="34" charset="0"/>
+                          <a:ea typeface="Be Vietnam Pro" pitchFamily="34" charset="-122"/>
+                          <a:cs typeface="Be Vietnam Pro" pitchFamily="34" charset="-120"/>
+                        </a:rPr>
+                        <a:t> định</a:t>
+                      </a:r>
+                      <a:r>
+                        <a:rPr lang="en-US" sz="2250" dirty="0" spc="1" kern="0">
+                          <a:solidFill>
+                            <a:srgbClr val="E4E1D8"/>
+                          </a:solidFill>
+                          <a:latin typeface="Be Vietnam Pro" pitchFamily="34" charset="0"/>
+                          <a:ea typeface="Be Vietnam Pro" pitchFamily="34" charset="-122"/>
+                          <a:cs typeface="Be Vietnam Pro" pitchFamily="34" charset="-120"/>
+                        </a:rPr>
+                        <a:t> danh</a:t>
+                      </a:r>
+                      <a:endParaRPr lang="en-US" sz="1200" dirty="0"/>
+                    </a:p>
+                  </a:txBody>
+                  <a:tcPr marL="76200" marR="76200" marT="76200" marB="76200">
+                    <a:lnL w="9525" cap="flat" cmpd="sng" algn="ctr">
+                      <a:solidFill>
+                        <a:srgbClr val="2D3140"/>
+                      </a:solidFill>
+                      <a:prstDash val="solid"/>
+                      <a:round/>
+                      <a:headEnd type="none" w="med" len="med"/>
+                      <a:tailEnd type="none" w="med" len="med"/>
+                    </a:lnL>
+                    <a:lnR w="9525" cap="flat" cmpd="sng" algn="ctr">
+                      <a:solidFill>
+                        <a:srgbClr val="2D3140"/>
+                      </a:solidFill>
+                      <a:prstDash val="solid"/>
+                      <a:round/>
+                      <a:headEnd type="none" w="med" len="med"/>
+                      <a:tailEnd type="none" w="med" len="med"/>
+                    </a:lnR>
+                    <a:lnT w="9525" cap="flat" cmpd="sng" algn="ctr">
+                      <a:solidFill>
+                        <a:srgbClr val="2D3140"/>
+                      </a:solidFill>
+                      <a:prstDash val="solid"/>
+                      <a:round/>
+                      <a:headEnd type="none" w="med" len="med"/>
+                      <a:tailEnd type="none" w="med" len="med"/>
+                    </a:lnT>
+                    <a:lnB w="0" cap="flat" cmpd="sng" algn="ctr">
+                      <a:noFill/>
+                    </a:lnB>
+                    <a:solidFill>
+                      <a:srgbClr val="1A1D25"/>
+                    </a:solidFill>
+                  </a:tcPr>
+                </a:tc>
+              </a:tr>
             </a:tbl>
           </a:graphicData>
         </a:graphic>
@@ -4169,7 +4364,7 @@
         </p:nvSpPr>
         <p:spPr>
           <a:xfrm>
-            <a:off x="914400" y="7239000"/>
+            <a:off x="914400" y="7620000"/>
             <a:ext cx="11430000" cy="428625"/>
           </a:xfrm>
           <a:prstGeom prst="rect">
@@ -4219,7 +4414,7 @@
         </p:nvSpPr>
         <p:spPr>
           <a:xfrm>
-            <a:off x="914400" y="7658100"/>
+            <a:off x="914400" y="8039100"/>
             <a:ext cx="16459200" cy="552450"/>
           </a:xfrm>
           <a:prstGeom prst="rect">
@@ -4335,7 +4530,7 @@
         </p:nvSpPr>
         <p:spPr>
           <a:xfrm>
-            <a:off x="914400" y="8191500"/>
+            <a:off x="914400" y="8572500"/>
             <a:ext cx="16459200" cy="390525"/>
           </a:xfrm>
           <a:prstGeom prst="rect">

--- a/system-design-101/vi/lessons/sd-02-025/slides/sd-02-025.pptx
+++ b/system-design-101/vi/lessons/sd-02-025/slides/sd-02-025.pptx
@@ -6821,7 +6821,7 @@
               <a:buNone/>
             </a:pPr>
             <a:r>
-              <a:rPr lang="en-US" sz="2550" dirty="0" spc="-1" kern="0">
+              <a:rPr lang="en-US" sz="2550" dirty="0" spc="1" kern="0">
                 <a:solidFill>
                   <a:srgbClr val="C4C8D6"/>
                 </a:solidFill>
@@ -6829,7 +6829,73 @@
                 <a:ea typeface="Be Vietnam Pro" pitchFamily="34" charset="-122"/>
                 <a:cs typeface="Be Vietnam Pro" pitchFamily="34" charset="-120"/>
               </a:rPr>
-              <a:t>Mỗi</a:t>
+              <a:t>Cách</a:t>
+            </a:r>
+            <a:r>
+              <a:rPr lang="en-US" sz="2550" dirty="0" spc="10" kern="0">
+                <a:solidFill>
+                  <a:srgbClr val="C4C8D6"/>
+                </a:solidFill>
+                <a:latin typeface="Be Vietnam Pro" pitchFamily="34" charset="0"/>
+                <a:ea typeface="Be Vietnam Pro" pitchFamily="34" charset="-122"/>
+                <a:cs typeface="Be Vietnam Pro" pitchFamily="34" charset="-120"/>
+              </a:rPr>
+              <a:t> đọc</a:t>
+            </a:r>
+            <a:r>
+              <a:rPr lang="en-US" sz="2550" dirty="0" spc="-2" kern="0">
+                <a:solidFill>
+                  <a:srgbClr val="C4C8D6"/>
+                </a:solidFill>
+                <a:latin typeface="Be Vietnam Pro" pitchFamily="34" charset="0"/>
+                <a:ea typeface="Be Vietnam Pro" pitchFamily="34" charset="-122"/>
+                <a:cs typeface="Be Vietnam Pro" pitchFamily="34" charset="-120"/>
+              </a:rPr>
+              <a:t> của</a:t>
+            </a:r>
+            <a:r>
+              <a:rPr lang="en-US" sz="2550" dirty="0" spc="5" kern="0">
+                <a:solidFill>
+                  <a:srgbClr val="C4C8D6"/>
+                </a:solidFill>
+                <a:latin typeface="Be Vietnam Pro" pitchFamily="34" charset="0"/>
+                <a:ea typeface="Be Vietnam Pro" pitchFamily="34" charset="-122"/>
+                <a:cs typeface="Be Vietnam Pro" pitchFamily="34" charset="-120"/>
+              </a:rPr>
+              <a:t> người</a:t>
+            </a:r>
+            <a:r>
+              <a:rPr lang="en-US" sz="2550" dirty="0" spc="0" kern="0">
+                <a:solidFill>
+                  <a:srgbClr val="C4C8D6"/>
+                </a:solidFill>
+                <a:latin typeface="Be Vietnam Pro" pitchFamily="34" charset="0"/>
+                <a:ea typeface="Be Vietnam Pro" pitchFamily="34" charset="-122"/>
+                <a:cs typeface="Be Vietnam Pro" pitchFamily="34" charset="-120"/>
+              </a:rPr>
+              <a:t> biên</a:t>
+            </a:r>
+            <a:r>
+              <a:rPr lang="en-US" sz="2550" dirty="0" spc="-7" kern="0">
+                <a:solidFill>
+                  <a:srgbClr val="C4C8D6"/>
+                </a:solidFill>
+                <a:latin typeface="Be Vietnam Pro" pitchFamily="34" charset="0"/>
+                <a:ea typeface="Be Vietnam Pro" pitchFamily="34" charset="-122"/>
+                <a:cs typeface="Be Vietnam Pro" pitchFamily="34" charset="-120"/>
+              </a:rPr>
+              <a:t> soạn:</a:t>
+            </a:r>
+            <a:r>
+              <a:rPr lang="en-US" sz="2550" dirty="0" spc="0" kern="0">
+                <a:solidFill>
+                  <a:srgbClr val="C4C8D6"/>
+                </a:solidFill>
+                <a:latin typeface="Be Vietnam Pro" pitchFamily="34" charset="0"/>
+                <a:ea typeface="Be Vietnam Pro" pitchFamily="34" charset="-122"/>
+                <a:cs typeface="Be Vietnam Pro" pitchFamily="34" charset="-120"/>
+              </a:rPr>
+              <a:t> mỗi</a:t>
             </a:r>
             <a:r>
               <a:rPr lang="en-US" sz="2550" dirty="0" spc="1" kern="0">
@@ -6876,7 +6942,7 @@
               <a:t> một</a:t>
             </a:r>
             <a:r>
-              <a:rPr lang="en-US" sz="2550" dirty="0" spc="21" kern="0">
+              <a:rPr lang="en-US" sz="2550" dirty="0" spc="19" kern="0">
                 <a:solidFill>
                   <a:srgbClr val="C4C8D6"/>
                 </a:solidFill>
@@ -6884,62 +6950,7 @@
                 <a:ea typeface="Be Vietnam Pro" pitchFamily="34" charset="-122"/>
                 <a:cs typeface="Be Vietnam Pro" pitchFamily="34" charset="-120"/>
               </a:rPr>
-              <a:t> điều</a:t>
-            </a:r>
-            <a:r>
-              <a:rPr lang="en-US" sz="2550" dirty="0" spc="2" kern="0">
-                <a:solidFill>
-                  <a:srgbClr val="C4C8D6"/>
-                </a:solidFill>
-                <a:latin typeface="Be Vietnam Pro" pitchFamily="34" charset="0"/>
-                <a:ea typeface="Be Vietnam Pro" pitchFamily="34" charset="-122"/>
-                <a:cs typeface="Be Vietnam Pro" pitchFamily="34" charset="-120"/>
-              </a:rPr>
-              <a:t> mà</a:t>
-            </a:r>
-            <a:r>
-              <a:rPr lang="en-US" sz="2550" dirty="0" spc="0" kern="0">
-                <a:solidFill>
-                  <a:srgbClr val="C4C8D6"/>
-                </a:solidFill>
-                <a:latin typeface="Be Vietnam Pro" pitchFamily="34" charset="0"/>
-                <a:ea typeface="Be Vietnam Pro" pitchFamily="34" charset="-122"/>
-                <a:cs typeface="Be Vietnam Pro" pitchFamily="34" charset="-120"/>
-              </a:rPr>
-              <a:t> chặng</a:t>
-            </a:r>
-            <a:r>
-              <a:rPr lang="en-US" sz="2550" dirty="0" spc="6" kern="0">
-                <a:solidFill>
-                  <a:srgbClr val="C4C8D6"/>
-                </a:solidFill>
-                <a:latin typeface="Be Vietnam Pro" pitchFamily="34" charset="0"/>
-                <a:ea typeface="Be Vietnam Pro" pitchFamily="34" charset="-122"/>
-                <a:cs typeface="Be Vietnam Pro" pitchFamily="34" charset="-120"/>
-              </a:rPr>
-              <a:t> trước</a:t>
-            </a:r>
-            <a:r>
-              <a:rPr lang="en-US" sz="2550" dirty="0" spc="0" kern="0">
-                <a:solidFill>
-                  <a:srgbClr val="C4C8D6"/>
-                </a:solidFill>
-                <a:latin typeface="Be Vietnam Pro" pitchFamily="34" charset="0"/>
-                <a:ea typeface="Be Vietnam Pro" pitchFamily="34" charset="-122"/>
-                <a:cs typeface="Be Vietnam Pro" pitchFamily="34" charset="-120"/>
-              </a:rPr>
-              <a:t> không</a:t>
-            </a:r>
-            <a:r>
-              <a:rPr lang="en-US" sz="2550" dirty="0" spc="-2" kern="0">
-                <a:solidFill>
-                  <a:srgbClr val="C4C8D6"/>
-                </a:solidFill>
-                <a:latin typeface="Be Vietnam Pro" pitchFamily="34" charset="0"/>
-                <a:ea typeface="Be Vietnam Pro" pitchFamily="34" charset="-122"/>
-                <a:cs typeface="Be Vietnam Pro" pitchFamily="34" charset="-120"/>
-              </a:rPr>
-              <a:t> biết.</a:t>
+              <a:t> điều.</a:t>
             </a:r>
             <a:endParaRPr lang="en-US" sz="2550" dirty="0"/>
           </a:p>
